--- a/assets/pptx/catalog-37.pptx
+++ b/assets/pptx/catalog-37.pptx
@@ -3327,7 +3327,7 @@
                 <a:ea typeface="Ebrima"/>
                 <a:cs typeface="Ebrima"/>
               </a:rPr>
-              <a:t>ኤሎሂ (4x)</a:t>
+              <a:t>ኤሎሂ 4x</a:t>
             </a:r>
           </a:p>
         </p:txBody>
@@ -3708,7 +3708,7 @@
                 <a:ea typeface="Ebrima"/>
                 <a:cs typeface="Ebrima"/>
               </a:rPr>
-              <a:t>ኤሎሂ (4x)</a:t>
+              <a:t>ኤሎሂ 4x</a:t>
             </a:r>
           </a:p>
         </p:txBody>
@@ -4053,7 +4053,7 @@
                 <a:ea typeface="Ebrima"/>
                 <a:cs typeface="Ebrima"/>
               </a:rPr>
-              <a:t>ኤሎሂ (3x) አሃ ኤሎሂ</a:t>
+              <a:t>ኤሎሂ 3x አሃ ኤሎሂ</a:t>
             </a:r>
           </a:p>
           <a:p>
@@ -4071,7 +4071,7 @@
                 <a:ea typeface="Ebrima"/>
                 <a:cs typeface="Ebrima"/>
               </a:rPr>
-              <a:t>ኤሎሂ (3x) አሃ ኤሎሂ</a:t>
+              <a:t>ኤሎሂ 3x አሃ ኤሎሂ</a:t>
             </a:r>
           </a:p>
         </p:txBody>
@@ -4452,7 +4452,7 @@
                 <a:ea typeface="Ebrima"/>
                 <a:cs typeface="Ebrima"/>
               </a:rPr>
-              <a:t>ኤሎሂ (3x) አሃ ኤሎሂ</a:t>
+              <a:t>ኤሎሂ 3x አሃ ኤሎሂ</a:t>
             </a:r>
           </a:p>
         </p:txBody>
@@ -4954,7 +4954,7 @@
                 <a:ea typeface="Ebrima"/>
                 <a:cs typeface="Ebrima"/>
               </a:rPr>
-              <a:t>ኤሎሂ (3x) አሃ ኤሎሂ</a:t>
+              <a:t>ኤሎሂ 3x አሃ ኤሎሂ</a:t>
             </a:r>
           </a:p>
         </p:txBody>
@@ -5075,7 +5075,7 @@
                 <a:ea typeface="Ebrima"/>
                 <a:cs typeface="Ebrima"/>
               </a:rPr>
-              <a:t>የዛሬን እንጂ የነገን አላየም (2x)</a:t>
+              <a:t>የዛሬን እንጂ የነገን አላየም 2x</a:t>
             </a:r>
           </a:p>
         </p:txBody>
